--- a/ev_navigation/전기차_에너지_예측_보고서.pptx
+++ b/ev_navigation/전기차_에너지_예측_보고서.pptx
@@ -17,9 +17,10 @@
     <p:sldId id="265" r:id="rId11"/>
     <p:sldId id="266" r:id="rId12"/>
     <p:sldId id="267" r:id="rId13"/>
+    <p:sldId id="268" r:id="rId14"/>
   </p:sldIdLst>
   <p:notesMasterIdLst>
-    <p:notesMasterId r:id="rId14"/>
+    <p:notesMasterId r:id="rId15"/>
   </p:notesMasterIdLst>
   <p:sldSz cx="12188952" cy="6858000"/>
   <p:notesSz cx="6858000" cy="12188952"/>
@@ -801,6 +802,94 @@
             <a:fld id="{F7021451-1387-4CA6-816F-3879F97B5CBC}" type="slidenum">
               <a:rPr lang="en-US"/>
               <a:t>12</a:t>
+            </a:fld>
+            <a:endParaRPr lang="en-US"/>
+          </a:p>
+        </p:txBody>
+      </p:sp>
+    </p:spTree>
+    <p:extLst>
+      <p:ext uri="{BB962C8B-B14F-4D97-AF65-F5344CB8AC3E}">
+        <p14:creationId xmlns:p14="http://schemas.microsoft.com/office/powerpoint/2010/main" val="1024086991"/>
+      </p:ext>
+    </p:extLst>
+  </p:cSld>
+  <p:clrMapOvr>
+    <a:masterClrMapping/>
+  </p:clrMapOvr>
+</p:notes>
+</file>
+
+<file path=ppt/notesSlides/notesSlide13.xml><?xml version="1.0" encoding="utf-8"?>
+<p:notes xmlns:a="http://schemas.openxmlformats.org/drawingml/2006/main" xmlns:r="http://schemas.openxmlformats.org/officeDocument/2006/relationships" xmlns:p="http://schemas.openxmlformats.org/presentationml/2006/main">
+  <p:cSld>
+    <p:spTree>
+      <p:nvGrpSpPr>
+        <p:cNvPr id="1" name=""/>
+        <p:cNvGrpSpPr/>
+        <p:nvPr/>
+      </p:nvGrpSpPr>
+      <p:grpSpPr>
+        <a:xfrm>
+          <a:off x="0" y="0"/>
+          <a:ext cx="0" cy="0"/>
+          <a:chOff x="0" y="0"/>
+          <a:chExt cx="0" cy="0"/>
+        </a:xfrm>
+      </p:grpSpPr>
+      <p:sp>
+        <p:nvSpPr>
+          <p:cNvPr id="2" name="Slide Image Placeholder 1"/>
+          <p:cNvSpPr>
+            <a:spLocks noGrp="1" noRot="1" noChangeAspect="1"/>
+          </p:cNvSpPr>
+          <p:nvPr>
+            <p:ph type="sldImg"/>
+          </p:nvPr>
+        </p:nvSpPr>
+        <p:spPr/>
+      </p:sp>
+      <p:sp>
+        <p:nvSpPr>
+          <p:cNvPr id="3" name="Notes Placeholder 2"/>
+          <p:cNvSpPr>
+            <a:spLocks noGrp="1"/>
+          </p:cNvSpPr>
+          <p:nvPr>
+            <p:ph type="body" idx="1"/>
+          </p:nvPr>
+        </p:nvSpPr>
+        <p:spPr/>
+        <p:txBody>
+          <a:bodyPr/>
+          <a:lstStyle/>
+          <a:p>
+            <a:r>
+              <a:rPr lang="en-US" dirty="0"/>
+              <a:t/>
+            </a:r>
+            <a:endParaRPr lang="en-US" dirty="0"/>
+          </a:p>
+        </p:txBody>
+      </p:sp>
+      <p:sp>
+        <p:nvSpPr>
+          <p:cNvPr id="4" name="Slide Number Placeholder 3"/>
+          <p:cNvSpPr>
+            <a:spLocks noGrp="1"/>
+          </p:cNvSpPr>
+          <p:nvPr>
+            <p:ph type="sldNum" sz="quarter" idx="10"/>
+          </p:nvPr>
+        </p:nvSpPr>
+        <p:spPr/>
+        <p:txBody>
+          <a:bodyPr/>
+          <a:lstStyle/>
+          <a:p>
+            <a:fld id="{F7021451-1387-4CA6-816F-3879F97B5CBC}" type="slidenum">
+              <a:rPr lang="en-US"/>
+              <a:t>13</a:t>
             </a:fld>
             <a:endParaRPr lang="en-US"/>
           </a:p>
@@ -7051,6 +7140,1057 @@
 </p:sld>
 </file>
 
+<file path=ppt/slides/slide13.xml><?xml version="1.0" encoding="utf-8"?>
+<p:sld xmlns:a="http://schemas.openxmlformats.org/drawingml/2006/main" xmlns:r="http://schemas.openxmlformats.org/officeDocument/2006/relationships" xmlns:p="http://schemas.openxmlformats.org/presentationml/2006/main">
+  <p:cSld name="Slide 13">
+    <p:bg>
+      <p:bgPr>
+        <a:solidFill>
+          <a:srgbClr val="FBF7EE"/>
+        </a:solidFill>
+      </p:bgPr>
+    </p:bg>
+    <p:spTree>
+      <p:nvGrpSpPr>
+        <p:cNvPr id="1" name=""/>
+        <p:cNvGrpSpPr/>
+        <p:nvPr/>
+      </p:nvGrpSpPr>
+      <p:grpSpPr>
+        <a:xfrm>
+          <a:off x="0" y="0"/>
+          <a:ext cx="0" cy="0"/>
+          <a:chOff x="0" y="0"/>
+          <a:chExt cx="0" cy="0"/>
+        </a:xfrm>
+      </p:grpSpPr>
+      <p:sp>
+        <p:nvSpPr>
+          <p:cNvPr id="2" name="Text 0"/>
+          <p:cNvSpPr txBox="1"/>
+          <p:nvPr/>
+        </p:nvSpPr>
+        <p:spPr>
+          <a:xfrm>
+            <a:off x="640080" y="384048"/>
+            <a:ext cx="10908792" cy="274320"/>
+          </a:xfrm>
+          <a:prstGeom prst="rect">
+            <a:avLst/>
+          </a:prstGeom>
+          <a:noFill/>
+          <a:ln/>
+        </p:spPr>
+        <p:txBody>
+          <a:bodyPr wrap="square" lIns="0" tIns="0" rIns="0" bIns="0" rtlCol="0" anchor="ctr"/>
+          <a:lstStyle/>
+          <a:p>
+            <a:pPr algn="l" indent="0" marL="0">
+              <a:buNone/>
+            </a:pPr>
+            <a:r>
+              <a:rPr lang="en-US" sz="1100" b="1" spc="200" kern="0" dirty="0">
+                <a:solidFill>
+                  <a:srgbClr val="F28C28"/>
+                </a:solidFill>
+                <a:latin typeface="Calibri" pitchFamily="34" charset="0"/>
+                <a:ea typeface="Calibri" pitchFamily="34" charset="-122"/>
+                <a:cs typeface="Calibri" pitchFamily="34" charset="-120"/>
+              </a:rPr>
+              <a:t>팀 프로젝트 회고</a:t>
+            </a:r>
+            <a:endParaRPr lang="en-US" sz="1100" dirty="0"/>
+          </a:p>
+        </p:txBody>
+      </p:sp>
+      <p:sp>
+        <p:nvSpPr>
+          <p:cNvPr id="3" name="Text 1"/>
+          <p:cNvSpPr txBox="1"/>
+          <p:nvPr/>
+        </p:nvSpPr>
+        <p:spPr>
+          <a:xfrm>
+            <a:off x="640080" y="658368"/>
+            <a:ext cx="10908792" cy="777240"/>
+          </a:xfrm>
+          <a:prstGeom prst="rect">
+            <a:avLst/>
+          </a:prstGeom>
+          <a:noFill/>
+          <a:ln/>
+        </p:spPr>
+        <p:txBody>
+          <a:bodyPr wrap="square" lIns="0" tIns="0" rIns="0" bIns="0" rtlCol="0" anchor="ctr"/>
+          <a:lstStyle/>
+          <a:p>
+            <a:pPr algn="l" indent="0" marL="0">
+              <a:lnSpc>
+                <a:spcPct val="108000"/>
+              </a:lnSpc>
+              <a:buNone/>
+            </a:pPr>
+            <a:r>
+              <a:rPr lang="en-US" sz="2600" b="1" dirty="0">
+                <a:solidFill>
+                  <a:srgbClr val="17324D"/>
+                </a:solidFill>
+                <a:latin typeface="Cambria" pitchFamily="34" charset="0"/>
+                <a:ea typeface="Cambria" pitchFamily="34" charset="-122"/>
+                <a:cs typeface="Cambria" pitchFamily="34" charset="-120"/>
+              </a:rPr>
+              <a:t>KPT 회고 — </a:t>
+            </a:r>
+            <a:pPr algn="l" indent="0" marL="0">
+              <a:lnSpc>
+                <a:spcPct val="108000"/>
+              </a:lnSpc>
+              <a:buNone/>
+            </a:pPr>
+            <a:r>
+              <a:rPr lang="en-US" sz="2600" b="1" dirty="0">
+                <a:solidFill>
+                  <a:srgbClr val="F28C28"/>
+                </a:solidFill>
+                <a:latin typeface="Cambria" pitchFamily="34" charset="0"/>
+                <a:ea typeface="Cambria" pitchFamily="34" charset="-122"/>
+                <a:cs typeface="Cambria" pitchFamily="34" charset="-120"/>
+              </a:rPr>
+              <a:t>Keep · Problem · Try</a:t>
+            </a:r>
+            <a:endParaRPr lang="en-US" sz="2600" dirty="0"/>
+          </a:p>
+        </p:txBody>
+      </p:sp>
+      <p:sp>
+        <p:nvSpPr>
+          <p:cNvPr id="4" name="Text 2"/>
+          <p:cNvSpPr txBox="1"/>
+          <p:nvPr/>
+        </p:nvSpPr>
+        <p:spPr>
+          <a:xfrm>
+            <a:off x="640080" y="1417320"/>
+            <a:ext cx="10908792" cy="457200"/>
+          </a:xfrm>
+          <a:prstGeom prst="rect">
+            <a:avLst/>
+          </a:prstGeom>
+          <a:noFill/>
+          <a:ln/>
+        </p:spPr>
+        <p:txBody>
+          <a:bodyPr wrap="square" lIns="0" tIns="0" rIns="0" bIns="0" rtlCol="0" anchor="ctr"/>
+          <a:lstStyle/>
+          <a:p>
+            <a:pPr algn="l" indent="0" marL="0">
+              <a:buNone/>
+            </a:pPr>
+            <a:r>
+              <a:rPr lang="en-US" sz="1300" dirty="0">
+                <a:solidFill>
+                  <a:srgbClr val="667583"/>
+                </a:solidFill>
+                <a:latin typeface="Calibri" pitchFamily="34" charset="0"/>
+                <a:ea typeface="Calibri" pitchFamily="34" charset="-122"/>
+                <a:cs typeface="Calibri" pitchFamily="34" charset="-120"/>
+              </a:rPr>
+              <a:t>문제정의와 방향성은 확실했지만, 결론의 완성도와 역할 분담에서 다음 프로젝트가 이어받을 개선점을 남긴다.</a:t>
+            </a:r>
+            <a:endParaRPr lang="en-US" sz="1300" dirty="0"/>
+          </a:p>
+        </p:txBody>
+      </p:sp>
+      <p:sp>
+        <p:nvSpPr>
+          <p:cNvPr id="5" name="Shape 3"/>
+          <p:cNvSpPr/>
+          <p:nvPr/>
+        </p:nvSpPr>
+        <p:spPr>
+          <a:xfrm>
+            <a:off x="640080" y="2194560"/>
+            <a:ext cx="3483864" cy="502920"/>
+          </a:xfrm>
+          <a:prstGeom prst="roundRect">
+            <a:avLst>
+              <a:gd name="adj" fmla="val 6364"/>
+            </a:avLst>
+          </a:prstGeom>
+          <a:solidFill>
+            <a:srgbClr val="4D8B6D"/>
+          </a:solidFill>
+          <a:ln/>
+        </p:spPr>
+      </p:sp>
+      <p:sp>
+        <p:nvSpPr>
+          <p:cNvPr id="6" name="Text 4"/>
+          <p:cNvSpPr txBox="1"/>
+          <p:nvPr/>
+        </p:nvSpPr>
+        <p:spPr>
+          <a:xfrm>
+            <a:off x="804672" y="2194560"/>
+            <a:ext cx="3154680" cy="502920"/>
+          </a:xfrm>
+          <a:prstGeom prst="rect">
+            <a:avLst/>
+          </a:prstGeom>
+          <a:noFill/>
+          <a:ln/>
+        </p:spPr>
+        <p:txBody>
+          <a:bodyPr wrap="square" lIns="0" tIns="0" rIns="0" bIns="0" rtlCol="0" anchor="ctr"/>
+          <a:lstStyle/>
+          <a:p>
+            <a:pPr indent="0" marL="0">
+              <a:buNone/>
+            </a:pPr>
+            <a:r>
+              <a:rPr lang="en-US" sz="1500" b="1" dirty="0">
+                <a:solidFill>
+                  <a:srgbClr val="FFFFFF"/>
+                </a:solidFill>
+                <a:latin typeface="Cambria" pitchFamily="34" charset="0"/>
+                <a:ea typeface="Cambria" pitchFamily="34" charset="-122"/>
+                <a:cs typeface="Cambria" pitchFamily="34" charset="-120"/>
+              </a:rPr>
+              <a:t>KEEP</a:t>
+            </a:r>
+            <a:pPr indent="0" marL="0">
+              <a:buNone/>
+            </a:pPr>
+            <a:r>
+              <a:rPr lang="en-US" sz="1050" dirty="0">
+                <a:solidFill>
+                  <a:srgbClr val="FFFFFF"/>
+                </a:solidFill>
+                <a:latin typeface="Calibri" pitchFamily="34" charset="0"/>
+                <a:ea typeface="Calibri" pitchFamily="34" charset="-122"/>
+                <a:cs typeface="Calibri" pitchFamily="34" charset="-120"/>
+              </a:rPr>
+              <a:t>   잘한 점</a:t>
+            </a:r>
+            <a:endParaRPr lang="en-US" sz="1500" dirty="0"/>
+          </a:p>
+        </p:txBody>
+      </p:sp>
+      <p:sp>
+        <p:nvSpPr>
+          <p:cNvPr id="7" name="Shape 5"/>
+          <p:cNvSpPr/>
+          <p:nvPr/>
+        </p:nvSpPr>
+        <p:spPr>
+          <a:xfrm>
+            <a:off x="640080" y="2807208"/>
+            <a:ext cx="3483864" cy="3200400"/>
+          </a:xfrm>
+          <a:prstGeom prst="roundRect">
+            <a:avLst>
+              <a:gd name="adj" fmla="val 1143"/>
+            </a:avLst>
+          </a:prstGeom>
+          <a:solidFill>
+            <a:srgbClr val="E9F4EE"/>
+          </a:solidFill>
+          <a:ln w="9525">
+            <a:solidFill>
+              <a:srgbClr val="FFFFFF"/>
+            </a:solidFill>
+            <a:prstDash val="solid"/>
+          </a:ln>
+        </p:spPr>
+      </p:sp>
+      <p:sp>
+        <p:nvSpPr>
+          <p:cNvPr id="8" name="Text 6"/>
+          <p:cNvSpPr txBox="1"/>
+          <p:nvPr/>
+        </p:nvSpPr>
+        <p:spPr>
+          <a:xfrm>
+            <a:off x="822960" y="2916936"/>
+            <a:ext cx="3118104" cy="2871216"/>
+          </a:xfrm>
+          <a:prstGeom prst="rect">
+            <a:avLst/>
+          </a:prstGeom>
+          <a:noFill/>
+          <a:ln/>
+        </p:spPr>
+        <p:txBody>
+          <a:bodyPr wrap="square" lIns="0" tIns="0" rIns="0" bIns="0" rtlCol="0" anchor="t"/>
+          <a:lstStyle/>
+          <a:p>
+            <a:pPr marL="342900" indent="-342900">
+              <a:lnSpc>
+                <a:spcPct val="125000"/>
+              </a:lnSpc>
+              <a:spcAft>
+                <a:spcPts val="1100"/>
+              </a:spcAft>
+              <a:buSzPct val="100000"/>
+              <a:buChar char="▪"/>
+            </a:pPr>
+            <a:r>
+              <a:rPr lang="en-US" sz="1200" dirty="0">
+                <a:solidFill>
+                  <a:srgbClr val="244763"/>
+                </a:solidFill>
+                <a:latin typeface="Calibri" pitchFamily="34" charset="0"/>
+                <a:ea typeface="Calibri" pitchFamily="34" charset="-122"/>
+                <a:cs typeface="Calibri" pitchFamily="34" charset="-120"/>
+              </a:rPr>
+              <a:t>현재의 협업 방식 그대로 유지</a:t>
+            </a:r>
+            <a:endParaRPr lang="en-US" sz="1200" dirty="0"/>
+          </a:p>
+          <a:p>
+            <a:pPr marL="342900" indent="-342900">
+              <a:lnSpc>
+                <a:spcPct val="125000"/>
+              </a:lnSpc>
+              <a:spcAft>
+                <a:spcPts val="1100"/>
+              </a:spcAft>
+              <a:buSzPct val="100000"/>
+              <a:buChar char="▪"/>
+            </a:pPr>
+            <a:r>
+              <a:rPr lang="en-US" sz="1200" dirty="0">
+                <a:solidFill>
+                  <a:srgbClr val="244763"/>
+                </a:solidFill>
+                <a:latin typeface="Calibri" pitchFamily="34" charset="0"/>
+                <a:ea typeface="Calibri" pitchFamily="34" charset="-122"/>
+                <a:cs typeface="Calibri" pitchFamily="34" charset="-120"/>
+              </a:rPr>
+              <a:t>명확한 타겟·방법론·방향성 설정</a:t>
+            </a:r>
+            <a:endParaRPr lang="en-US" sz="1200" dirty="0"/>
+          </a:p>
+          <a:p>
+            <a:pPr marL="342900" indent="-342900">
+              <a:lnSpc>
+                <a:spcPct val="125000"/>
+              </a:lnSpc>
+              <a:spcAft>
+                <a:spcPts val="1100"/>
+              </a:spcAft>
+              <a:buSzPct val="100000"/>
+              <a:buChar char="▪"/>
+            </a:pPr>
+            <a:r>
+              <a:rPr lang="en-US" sz="1200" dirty="0">
+                <a:solidFill>
+                  <a:srgbClr val="244763"/>
+                </a:solidFill>
+                <a:latin typeface="Calibri" pitchFamily="34" charset="0"/>
+                <a:ea typeface="Calibri" pitchFamily="34" charset="-122"/>
+                <a:cs typeface="Calibri" pitchFamily="34" charset="-120"/>
+              </a:rPr>
+              <a:t>확실하게 잡힌 기획 틀</a:t>
+            </a:r>
+            <a:endParaRPr lang="en-US" sz="1200" dirty="0"/>
+          </a:p>
+          <a:p>
+            <a:pPr marL="342900" indent="-342900">
+              <a:lnSpc>
+                <a:spcPct val="125000"/>
+              </a:lnSpc>
+              <a:spcAft>
+                <a:spcPts val="1100"/>
+              </a:spcAft>
+              <a:buSzPct val="100000"/>
+              <a:buChar char="▪"/>
+            </a:pPr>
+            <a:r>
+              <a:rPr lang="en-US" sz="1200" dirty="0">
+                <a:solidFill>
+                  <a:srgbClr val="244763"/>
+                </a:solidFill>
+                <a:latin typeface="Calibri" pitchFamily="34" charset="0"/>
+                <a:ea typeface="Calibri" pitchFamily="34" charset="-122"/>
+                <a:cs typeface="Calibri" pitchFamily="34" charset="-120"/>
+              </a:rPr>
+              <a:t>초반 회의를 통한 충분한 대화</a:t>
+            </a:r>
+            <a:endParaRPr lang="en-US" sz="1200" dirty="0"/>
+          </a:p>
+          <a:p>
+            <a:pPr marL="342900" indent="-342900">
+              <a:lnSpc>
+                <a:spcPct val="125000"/>
+              </a:lnSpc>
+              <a:spcAft>
+                <a:spcPts val="1100"/>
+              </a:spcAft>
+              <a:buSzPct val="100000"/>
+              <a:buChar char="▪"/>
+            </a:pPr>
+            <a:r>
+              <a:rPr lang="en-US" sz="1200" dirty="0">
+                <a:solidFill>
+                  <a:srgbClr val="244763"/>
+                </a:solidFill>
+                <a:latin typeface="Calibri" pitchFamily="34" charset="0"/>
+                <a:ea typeface="Calibri" pitchFamily="34" charset="-122"/>
+                <a:cs typeface="Calibri" pitchFamily="34" charset="-120"/>
+              </a:rPr>
+              <a:t>타 팀보다 현실적인 조건으로 실질적 도움이 되는 결과 도출</a:t>
+            </a:r>
+            <a:endParaRPr lang="en-US" sz="1200" dirty="0"/>
+          </a:p>
+          <a:p>
+            <a:pPr marL="342900" indent="-342900">
+              <a:lnSpc>
+                <a:spcPct val="125000"/>
+              </a:lnSpc>
+              <a:spcAft>
+                <a:spcPts val="1100"/>
+              </a:spcAft>
+              <a:buSzPct val="100000"/>
+              <a:buChar char="▪"/>
+            </a:pPr>
+            <a:r>
+              <a:rPr lang="en-US" sz="1200" dirty="0">
+                <a:solidFill>
+                  <a:srgbClr val="244763"/>
+                </a:solidFill>
+                <a:latin typeface="Calibri" pitchFamily="34" charset="0"/>
+                <a:ea typeface="Calibri" pitchFamily="34" charset="-122"/>
+                <a:cs typeface="Calibri" pitchFamily="34" charset="-120"/>
+              </a:rPr>
+              <a:t>주제 선정부터 문제정의까지 방향성을 잘 설정</a:t>
+            </a:r>
+            <a:endParaRPr lang="en-US" sz="1200" dirty="0"/>
+          </a:p>
+        </p:txBody>
+      </p:sp>
+      <p:sp>
+        <p:nvSpPr>
+          <p:cNvPr id="9" name="Shape 7"/>
+          <p:cNvSpPr/>
+          <p:nvPr/>
+        </p:nvSpPr>
+        <p:spPr>
+          <a:xfrm>
+            <a:off x="4352544" y="2194560"/>
+            <a:ext cx="3483864" cy="502920"/>
+          </a:xfrm>
+          <a:prstGeom prst="roundRect">
+            <a:avLst>
+              <a:gd name="adj" fmla="val 6364"/>
+            </a:avLst>
+          </a:prstGeom>
+          <a:solidFill>
+            <a:srgbClr val="B94B43"/>
+          </a:solidFill>
+          <a:ln/>
+        </p:spPr>
+      </p:sp>
+      <p:sp>
+        <p:nvSpPr>
+          <p:cNvPr id="10" name="Text 8"/>
+          <p:cNvSpPr txBox="1"/>
+          <p:nvPr/>
+        </p:nvSpPr>
+        <p:spPr>
+          <a:xfrm>
+            <a:off x="4517136" y="2194560"/>
+            <a:ext cx="3154680" cy="502920"/>
+          </a:xfrm>
+          <a:prstGeom prst="rect">
+            <a:avLst/>
+          </a:prstGeom>
+          <a:noFill/>
+          <a:ln/>
+        </p:spPr>
+        <p:txBody>
+          <a:bodyPr wrap="square" lIns="0" tIns="0" rIns="0" bIns="0" rtlCol="0" anchor="ctr"/>
+          <a:lstStyle/>
+          <a:p>
+            <a:pPr indent="0" marL="0">
+              <a:buNone/>
+            </a:pPr>
+            <a:r>
+              <a:rPr lang="en-US" sz="1500" b="1" dirty="0">
+                <a:solidFill>
+                  <a:srgbClr val="FFFFFF"/>
+                </a:solidFill>
+                <a:latin typeface="Cambria" pitchFamily="34" charset="0"/>
+                <a:ea typeface="Cambria" pitchFamily="34" charset="-122"/>
+                <a:cs typeface="Cambria" pitchFamily="34" charset="-120"/>
+              </a:rPr>
+              <a:t>PROBLEM</a:t>
+            </a:r>
+            <a:pPr indent="0" marL="0">
+              <a:buNone/>
+            </a:pPr>
+            <a:r>
+              <a:rPr lang="en-US" sz="1050" dirty="0">
+                <a:solidFill>
+                  <a:srgbClr val="FFFFFF"/>
+                </a:solidFill>
+                <a:latin typeface="Calibri" pitchFamily="34" charset="0"/>
+                <a:ea typeface="Calibri" pitchFamily="34" charset="-122"/>
+                <a:cs typeface="Calibri" pitchFamily="34" charset="-120"/>
+              </a:rPr>
+              <a:t>   문제점</a:t>
+            </a:r>
+            <a:endParaRPr lang="en-US" sz="1500" dirty="0"/>
+          </a:p>
+        </p:txBody>
+      </p:sp>
+      <p:sp>
+        <p:nvSpPr>
+          <p:cNvPr id="11" name="Shape 9"/>
+          <p:cNvSpPr/>
+          <p:nvPr/>
+        </p:nvSpPr>
+        <p:spPr>
+          <a:xfrm>
+            <a:off x="4352544" y="2807208"/>
+            <a:ext cx="3483864" cy="3200400"/>
+          </a:xfrm>
+          <a:prstGeom prst="roundRect">
+            <a:avLst>
+              <a:gd name="adj" fmla="val 1143"/>
+            </a:avLst>
+          </a:prstGeom>
+          <a:solidFill>
+            <a:srgbClr val="F9EDEE"/>
+          </a:solidFill>
+          <a:ln w="9525">
+            <a:solidFill>
+              <a:srgbClr val="FFFFFF"/>
+            </a:solidFill>
+            <a:prstDash val="solid"/>
+          </a:ln>
+        </p:spPr>
+      </p:sp>
+      <p:sp>
+        <p:nvSpPr>
+          <p:cNvPr id="12" name="Text 10"/>
+          <p:cNvSpPr txBox="1"/>
+          <p:nvPr/>
+        </p:nvSpPr>
+        <p:spPr>
+          <a:xfrm>
+            <a:off x="4535424" y="2916936"/>
+            <a:ext cx="3118104" cy="2871216"/>
+          </a:xfrm>
+          <a:prstGeom prst="rect">
+            <a:avLst/>
+          </a:prstGeom>
+          <a:noFill/>
+          <a:ln/>
+        </p:spPr>
+        <p:txBody>
+          <a:bodyPr wrap="square" lIns="0" tIns="0" rIns="0" bIns="0" rtlCol="0" anchor="t"/>
+          <a:lstStyle/>
+          <a:p>
+            <a:pPr marL="342900" indent="-342900">
+              <a:lnSpc>
+                <a:spcPct val="125000"/>
+              </a:lnSpc>
+              <a:spcAft>
+                <a:spcPts val="1100"/>
+              </a:spcAft>
+              <a:buSzPct val="100000"/>
+              <a:buChar char="▪"/>
+            </a:pPr>
+            <a:r>
+              <a:rPr lang="en-US" sz="1200" dirty="0">
+                <a:solidFill>
+                  <a:srgbClr val="244763"/>
+                </a:solidFill>
+                <a:latin typeface="Calibri" pitchFamily="34" charset="0"/>
+                <a:ea typeface="Calibri" pitchFamily="34" charset="-122"/>
+                <a:cs typeface="Calibri" pitchFamily="34" charset="-120"/>
+              </a:rPr>
+              <a:t>최종 결론이 미흡하고 방향성이 부족</a:t>
+            </a:r>
+            <a:endParaRPr lang="en-US" sz="1200" dirty="0"/>
+          </a:p>
+          <a:p>
+            <a:pPr marL="342900" indent="-342900">
+              <a:lnSpc>
+                <a:spcPct val="125000"/>
+              </a:lnSpc>
+              <a:spcAft>
+                <a:spcPts val="1100"/>
+              </a:spcAft>
+              <a:buSzPct val="100000"/>
+              <a:buChar char="▪"/>
+            </a:pPr>
+            <a:r>
+              <a:rPr lang="en-US" sz="1200" dirty="0">
+                <a:solidFill>
+                  <a:srgbClr val="244763"/>
+                </a:solidFill>
+                <a:latin typeface="Calibri" pitchFamily="34" charset="0"/>
+                <a:ea typeface="Calibri" pitchFamily="34" charset="-122"/>
+                <a:cs typeface="Calibri" pitchFamily="34" charset="-120"/>
+              </a:rPr>
+              <a:t>제공된 데이터의 한계로 프로젝트 완성도 부족</a:t>
+            </a:r>
+            <a:endParaRPr lang="en-US" sz="1200" dirty="0"/>
+          </a:p>
+          <a:p>
+            <a:pPr marL="342900" indent="-342900">
+              <a:lnSpc>
+                <a:spcPct val="125000"/>
+              </a:lnSpc>
+              <a:spcAft>
+                <a:spcPts val="1100"/>
+              </a:spcAft>
+              <a:buSzPct val="100000"/>
+              <a:buChar char="▪"/>
+            </a:pPr>
+            <a:r>
+              <a:rPr lang="en-US" sz="1200" dirty="0">
+                <a:solidFill>
+                  <a:srgbClr val="244763"/>
+                </a:solidFill>
+                <a:latin typeface="Calibri" pitchFamily="34" charset="0"/>
+                <a:ea typeface="Calibri" pitchFamily="34" charset="-122"/>
+                <a:cs typeface="Calibri" pitchFamily="34" charset="-120"/>
+              </a:rPr>
+              <a:t>모두가 E2E로 같은 일을 해 다양한 시도를 할 시간 부족</a:t>
+            </a:r>
+            <a:endParaRPr lang="en-US" sz="1200" dirty="0"/>
+          </a:p>
+          <a:p>
+            <a:pPr marL="342900" indent="-342900">
+              <a:lnSpc>
+                <a:spcPct val="125000"/>
+              </a:lnSpc>
+              <a:spcAft>
+                <a:spcPts val="1100"/>
+              </a:spcAft>
+              <a:buSzPct val="100000"/>
+              <a:buChar char="▪"/>
+            </a:pPr>
+            <a:r>
+              <a:rPr lang="en-US" sz="1200" dirty="0">
+                <a:solidFill>
+                  <a:srgbClr val="244763"/>
+                </a:solidFill>
+                <a:latin typeface="Calibri" pitchFamily="34" charset="0"/>
+                <a:ea typeface="Calibri" pitchFamily="34" charset="-122"/>
+                <a:cs typeface="Calibri" pitchFamily="34" charset="-120"/>
+              </a:rPr>
+              <a:t>다양성 확보를 위한 역할 세분화 미흡</a:t>
+            </a:r>
+            <a:endParaRPr lang="en-US" sz="1200" dirty="0"/>
+          </a:p>
+          <a:p>
+            <a:pPr marL="342900" indent="-342900">
+              <a:lnSpc>
+                <a:spcPct val="125000"/>
+              </a:lnSpc>
+              <a:spcAft>
+                <a:spcPts val="1100"/>
+              </a:spcAft>
+              <a:buSzPct val="100000"/>
+              <a:buChar char="▪"/>
+            </a:pPr>
+            <a:r>
+              <a:rPr lang="en-US" sz="1200" dirty="0">
+                <a:solidFill>
+                  <a:srgbClr val="244763"/>
+                </a:solidFill>
+                <a:latin typeface="Calibri" pitchFamily="34" charset="0"/>
+                <a:ea typeface="Calibri" pitchFamily="34" charset="-122"/>
+                <a:cs typeface="Calibri" pitchFamily="34" charset="-120"/>
+              </a:rPr>
+              <a:t>PM 부재로 기획이 다소 허술</a:t>
+            </a:r>
+            <a:endParaRPr lang="en-US" sz="1200" dirty="0"/>
+          </a:p>
+          <a:p>
+            <a:pPr marL="342900" indent="-342900">
+              <a:lnSpc>
+                <a:spcPct val="125000"/>
+              </a:lnSpc>
+              <a:spcAft>
+                <a:spcPts val="1100"/>
+              </a:spcAft>
+              <a:buSzPct val="100000"/>
+              <a:buChar char="▪"/>
+            </a:pPr>
+            <a:r>
+              <a:rPr lang="en-US" sz="1200" dirty="0">
+                <a:solidFill>
+                  <a:srgbClr val="244763"/>
+                </a:solidFill>
+                <a:latin typeface="Calibri" pitchFamily="34" charset="0"/>
+                <a:ea typeface="Calibri" pitchFamily="34" charset="-122"/>
+                <a:cs typeface="Calibri" pitchFamily="34" charset="-120"/>
+              </a:rPr>
+              <a:t>같은 데이터인데 전처리를 각자 진행</a:t>
+            </a:r>
+            <a:endParaRPr lang="en-US" sz="1200" dirty="0"/>
+          </a:p>
+        </p:txBody>
+      </p:sp>
+      <p:sp>
+        <p:nvSpPr>
+          <p:cNvPr id="13" name="Shape 11"/>
+          <p:cNvSpPr/>
+          <p:nvPr/>
+        </p:nvSpPr>
+        <p:spPr>
+          <a:xfrm>
+            <a:off x="8065008" y="2194560"/>
+            <a:ext cx="3483864" cy="502920"/>
+          </a:xfrm>
+          <a:prstGeom prst="roundRect">
+            <a:avLst>
+              <a:gd name="adj" fmla="val 6364"/>
+            </a:avLst>
+          </a:prstGeom>
+          <a:solidFill>
+            <a:srgbClr val="355F80"/>
+          </a:solidFill>
+          <a:ln/>
+        </p:spPr>
+      </p:sp>
+      <p:sp>
+        <p:nvSpPr>
+          <p:cNvPr id="14" name="Text 12"/>
+          <p:cNvSpPr txBox="1"/>
+          <p:nvPr/>
+        </p:nvSpPr>
+        <p:spPr>
+          <a:xfrm>
+            <a:off x="8229600" y="2194560"/>
+            <a:ext cx="3154680" cy="502920"/>
+          </a:xfrm>
+          <a:prstGeom prst="rect">
+            <a:avLst/>
+          </a:prstGeom>
+          <a:noFill/>
+          <a:ln/>
+        </p:spPr>
+        <p:txBody>
+          <a:bodyPr wrap="square" lIns="0" tIns="0" rIns="0" bIns="0" rtlCol="0" anchor="ctr"/>
+          <a:lstStyle/>
+          <a:p>
+            <a:pPr indent="0" marL="0">
+              <a:buNone/>
+            </a:pPr>
+            <a:r>
+              <a:rPr lang="en-US" sz="1500" b="1" dirty="0">
+                <a:solidFill>
+                  <a:srgbClr val="FFFFFF"/>
+                </a:solidFill>
+                <a:latin typeface="Cambria" pitchFamily="34" charset="0"/>
+                <a:ea typeface="Cambria" pitchFamily="34" charset="-122"/>
+                <a:cs typeface="Cambria" pitchFamily="34" charset="-120"/>
+              </a:rPr>
+              <a:t>TRY</a:t>
+            </a:r>
+            <a:pPr indent="0" marL="0">
+              <a:buNone/>
+            </a:pPr>
+            <a:r>
+              <a:rPr lang="en-US" sz="1050" dirty="0">
+                <a:solidFill>
+                  <a:srgbClr val="FFFFFF"/>
+                </a:solidFill>
+                <a:latin typeface="Calibri" pitchFamily="34" charset="0"/>
+                <a:ea typeface="Calibri" pitchFamily="34" charset="-122"/>
+                <a:cs typeface="Calibri" pitchFamily="34" charset="-120"/>
+              </a:rPr>
+              <a:t>   개선할 점</a:t>
+            </a:r>
+            <a:endParaRPr lang="en-US" sz="1500" dirty="0"/>
+          </a:p>
+        </p:txBody>
+      </p:sp>
+      <p:sp>
+        <p:nvSpPr>
+          <p:cNvPr id="15" name="Shape 13"/>
+          <p:cNvSpPr/>
+          <p:nvPr/>
+        </p:nvSpPr>
+        <p:spPr>
+          <a:xfrm>
+            <a:off x="8065008" y="2807208"/>
+            <a:ext cx="3483864" cy="3200400"/>
+          </a:xfrm>
+          <a:prstGeom prst="roundRect">
+            <a:avLst>
+              <a:gd name="adj" fmla="val 1143"/>
+            </a:avLst>
+          </a:prstGeom>
+          <a:solidFill>
+            <a:srgbClr val="E9F0F5"/>
+          </a:solidFill>
+          <a:ln w="9525">
+            <a:solidFill>
+              <a:srgbClr val="FFFFFF"/>
+            </a:solidFill>
+            <a:prstDash val="solid"/>
+          </a:ln>
+        </p:spPr>
+      </p:sp>
+      <p:sp>
+        <p:nvSpPr>
+          <p:cNvPr id="16" name="Text 14"/>
+          <p:cNvSpPr txBox="1"/>
+          <p:nvPr/>
+        </p:nvSpPr>
+        <p:spPr>
+          <a:xfrm>
+            <a:off x="8247888" y="2916936"/>
+            <a:ext cx="3118104" cy="2871216"/>
+          </a:xfrm>
+          <a:prstGeom prst="rect">
+            <a:avLst/>
+          </a:prstGeom>
+          <a:noFill/>
+          <a:ln/>
+        </p:spPr>
+        <p:txBody>
+          <a:bodyPr wrap="square" lIns="0" tIns="0" rIns="0" bIns="0" rtlCol="0" anchor="t"/>
+          <a:lstStyle/>
+          <a:p>
+            <a:pPr marL="342900" indent="-342900">
+              <a:lnSpc>
+                <a:spcPct val="125000"/>
+              </a:lnSpc>
+              <a:spcAft>
+                <a:spcPts val="1100"/>
+              </a:spcAft>
+              <a:buSzPct val="100000"/>
+              <a:buChar char="▪"/>
+            </a:pPr>
+            <a:r>
+              <a:rPr lang="en-US" sz="1200" dirty="0">
+                <a:solidFill>
+                  <a:srgbClr val="244763"/>
+                </a:solidFill>
+                <a:latin typeface="Calibri" pitchFamily="34" charset="0"/>
+                <a:ea typeface="Calibri" pitchFamily="34" charset="-122"/>
+                <a:cs typeface="Calibri" pitchFamily="34" charset="-120"/>
+              </a:rPr>
+              <a:t>문제정의부터 피드백까지 이어지는 프로세스로 마무리</a:t>
+            </a:r>
+            <a:endParaRPr lang="en-US" sz="1200" dirty="0"/>
+          </a:p>
+          <a:p>
+            <a:pPr marL="342900" indent="-342900">
+              <a:lnSpc>
+                <a:spcPct val="125000"/>
+              </a:lnSpc>
+              <a:spcAft>
+                <a:spcPts val="1100"/>
+              </a:spcAft>
+              <a:buSzPct val="100000"/>
+              <a:buChar char="▪"/>
+            </a:pPr>
+            <a:r>
+              <a:rPr lang="en-US" sz="1200" dirty="0">
+                <a:solidFill>
+                  <a:srgbClr val="244763"/>
+                </a:solidFill>
+                <a:latin typeface="Calibri" pitchFamily="34" charset="0"/>
+                <a:ea typeface="Calibri" pitchFamily="34" charset="-122"/>
+                <a:cs typeface="Calibri" pitchFamily="34" charset="-120"/>
+              </a:rPr>
+              <a:t>팀원 간 의사소통 강화와 체계적인 문서화</a:t>
+            </a:r>
+            <a:endParaRPr lang="en-US" sz="1200" dirty="0"/>
+          </a:p>
+          <a:p>
+            <a:pPr marL="342900" indent="-342900">
+              <a:lnSpc>
+                <a:spcPct val="125000"/>
+              </a:lnSpc>
+              <a:spcAft>
+                <a:spcPts val="1100"/>
+              </a:spcAft>
+              <a:buSzPct val="100000"/>
+              <a:buChar char="▪"/>
+            </a:pPr>
+            <a:r>
+              <a:rPr lang="en-US" sz="1200" dirty="0">
+                <a:solidFill>
+                  <a:srgbClr val="244763"/>
+                </a:solidFill>
+                <a:latin typeface="Calibri" pitchFamily="34" charset="0"/>
+                <a:ea typeface="Calibri" pitchFamily="34" charset="-122"/>
+                <a:cs typeface="Calibri" pitchFamily="34" charset="-120"/>
+              </a:rPr>
+              <a:t>기획을 튼튼히 하되 방향에 따라 역할 세분화</a:t>
+            </a:r>
+            <a:endParaRPr lang="en-US" sz="1200" dirty="0"/>
+          </a:p>
+          <a:p>
+            <a:pPr marL="342900" indent="-342900">
+              <a:lnSpc>
+                <a:spcPct val="125000"/>
+              </a:lnSpc>
+              <a:spcAft>
+                <a:spcPts val="1100"/>
+              </a:spcAft>
+              <a:buSzPct val="100000"/>
+              <a:buChar char="▪"/>
+            </a:pPr>
+            <a:r>
+              <a:rPr lang="en-US" sz="1200" dirty="0">
+                <a:solidFill>
+                  <a:srgbClr val="244763"/>
+                </a:solidFill>
+                <a:latin typeface="Calibri" pitchFamily="34" charset="0"/>
+                <a:ea typeface="Calibri" pitchFamily="34" charset="-122"/>
+                <a:cs typeface="Calibri" pitchFamily="34" charset="-120"/>
+              </a:rPr>
+              <a:t>맡고 싶은 분야가 있으면 적극적으로 의견 표명</a:t>
+            </a:r>
+            <a:endParaRPr lang="en-US" sz="1200" dirty="0"/>
+          </a:p>
+          <a:p>
+            <a:pPr marL="342900" indent="-342900">
+              <a:lnSpc>
+                <a:spcPct val="125000"/>
+              </a:lnSpc>
+              <a:spcAft>
+                <a:spcPts val="1100"/>
+              </a:spcAft>
+              <a:buSzPct val="100000"/>
+              <a:buChar char="▪"/>
+            </a:pPr>
+            <a:r>
+              <a:rPr lang="en-US" sz="1200" dirty="0">
+                <a:solidFill>
+                  <a:srgbClr val="244763"/>
+                </a:solidFill>
+                <a:latin typeface="Calibri" pitchFamily="34" charset="0"/>
+                <a:ea typeface="Calibri" pitchFamily="34" charset="-122"/>
+                <a:cs typeface="Calibri" pitchFamily="34" charset="-120"/>
+              </a:rPr>
+              <a:t>도움이 필요할 때 주저 없이 요청</a:t>
+            </a:r>
+            <a:endParaRPr lang="en-US" sz="1200" dirty="0"/>
+          </a:p>
+          <a:p>
+            <a:pPr marL="342900" indent="-342900">
+              <a:lnSpc>
+                <a:spcPct val="125000"/>
+              </a:lnSpc>
+              <a:spcAft>
+                <a:spcPts val="1100"/>
+              </a:spcAft>
+              <a:buSzPct val="100000"/>
+              <a:buChar char="▪"/>
+            </a:pPr>
+            <a:r>
+              <a:rPr lang="en-US" sz="1200" dirty="0">
+                <a:solidFill>
+                  <a:srgbClr val="244763"/>
+                </a:solidFill>
+                <a:latin typeface="Calibri" pitchFamily="34" charset="0"/>
+                <a:ea typeface="Calibri" pitchFamily="34" charset="-122"/>
+                <a:cs typeface="Calibri" pitchFamily="34" charset="-120"/>
+              </a:rPr>
+              <a:t>전처리는 공동 진행 후 상위 데이터 추출·튜닝으로 다양성 추구</a:t>
+            </a:r>
+            <a:endParaRPr lang="en-US" sz="1200" dirty="0"/>
+          </a:p>
+        </p:txBody>
+      </p:sp>
+      <p:sp>
+        <p:nvSpPr>
+          <p:cNvPr id="17" name="Text 15"/>
+          <p:cNvSpPr txBox="1"/>
+          <p:nvPr/>
+        </p:nvSpPr>
+        <p:spPr>
+          <a:xfrm>
+            <a:off x="640080" y="6510528"/>
+            <a:ext cx="7315200" cy="256032"/>
+          </a:xfrm>
+          <a:prstGeom prst="rect">
+            <a:avLst/>
+          </a:prstGeom>
+          <a:noFill/>
+          <a:ln/>
+        </p:spPr>
+        <p:txBody>
+          <a:bodyPr wrap="square" lIns="0" tIns="0" rIns="0" bIns="0" rtlCol="0" anchor="ctr"/>
+          <a:lstStyle/>
+          <a:p>
+            <a:pPr indent="0" marL="0">
+              <a:buNone/>
+            </a:pPr>
+            <a:r>
+              <a:rPr lang="en-US" sz="800" dirty="0">
+                <a:solidFill>
+                  <a:srgbClr val="9DA9AF"/>
+                </a:solidFill>
+                <a:latin typeface="Calibri" pitchFamily="34" charset="0"/>
+                <a:ea typeface="Calibri" pitchFamily="34" charset="-122"/>
+                <a:cs typeface="Calibri" pitchFamily="34" charset="-120"/>
+              </a:rPr>
+              <a:t>TEAM RETROSPECTIVE · KPT</a:t>
+            </a:r>
+            <a:endParaRPr lang="en-US" sz="800" dirty="0"/>
+          </a:p>
+        </p:txBody>
+      </p:sp>
+      <p:sp>
+        <p:nvSpPr>
+          <p:cNvPr id="18" name="Text 16"/>
+          <p:cNvSpPr txBox="1"/>
+          <p:nvPr/>
+        </p:nvSpPr>
+        <p:spPr>
+          <a:xfrm>
+            <a:off x="10634472" y="6510528"/>
+            <a:ext cx="914400" cy="256032"/>
+          </a:xfrm>
+          <a:prstGeom prst="rect">
+            <a:avLst/>
+          </a:prstGeom>
+          <a:noFill/>
+          <a:ln/>
+        </p:spPr>
+        <p:txBody>
+          <a:bodyPr wrap="square" lIns="0" tIns="0" rIns="0" bIns="0" rtlCol="0" anchor="ctr"/>
+          <a:lstStyle/>
+          <a:p>
+            <a:pPr algn="r" indent="0" marL="0">
+              <a:buNone/>
+            </a:pPr>
+            <a:r>
+              <a:rPr lang="en-US" sz="800" b="1" dirty="0">
+                <a:solidFill>
+                  <a:srgbClr val="F28C28"/>
+                </a:solidFill>
+                <a:latin typeface="Calibri" pitchFamily="34" charset="0"/>
+                <a:ea typeface="Calibri" pitchFamily="34" charset="-122"/>
+                <a:cs typeface="Calibri" pitchFamily="34" charset="-120"/>
+              </a:rPr>
+              <a:t>13</a:t>
+            </a:r>
+            <a:endParaRPr lang="en-US" sz="800" dirty="0"/>
+          </a:p>
+        </p:txBody>
+      </p:sp>
+    </p:spTree>
+  </p:cSld>
+  <p:clrMapOvr>
+    <a:masterClrMapping/>
+  </p:clrMapOvr>
+</p:sld>
+</file>
+
 <file path=ppt/slides/slide2.xml><?xml version="1.0" encoding="utf-8"?>
 <p:sld xmlns:a="http://schemas.openxmlformats.org/drawingml/2006/main" xmlns:r="http://schemas.openxmlformats.org/officeDocument/2006/relationships" xmlns:p="http://schemas.openxmlformats.org/presentationml/2006/main">
   <p:cSld name="Slide 2">
